--- a/site/sistematicos-apresentacao.pptx
+++ b/site/sistematicos-apresentacao.pptx
@@ -18245,6 +18245,7 @@
           </a:bodyPr>
           <a:lstStyle/>
           <a:p>
+            <a:pPr algn="ctr"/>
             <a:r>
               <a:rPr sz="1200" b="1" i="0" spc="220">
                 <a:solidFill>
@@ -18279,6 +18280,7 @@
           </a:bodyPr>
           <a:lstStyle/>
           <a:p>
+            <a:pPr algn="ctr"/>
             <a:r>
               <a:rPr sz="5200" b="1" i="1">
                 <a:solidFill>
@@ -18313,7 +18315,7 @@
           </a:bodyPr>
           <a:lstStyle/>
           <a:p>
-            <a:pPr>
+            <a:pPr algn="ctr">
               <a:lnSpc>
                 <a:spcPct val="120000"/>
               </a:lnSpc>
@@ -18723,6 +18725,7 @@
           </a:bodyPr>
           <a:lstStyle/>
           <a:p>
+            <a:pPr algn="ctr"/>
             <a:r>
               <a:rPr sz="2600" b="1" i="1">
                 <a:solidFill>
